--- a/abbildungen/kap3/Analysewege_im_Reporting.pptx
+++ b/abbildungen/kap3/Analysewege_im_Reporting.pptx
@@ -7,7 +7,7 @@
   <p:sldIdLst>
     <p:sldId id="256" r:id="rId7"/>
   </p:sldIdLst>
-  <p:sldSz cx="3960000" cy="2282400" type="screen4x3"/>
+  <p:sldSz cx="3960000" cy="2001600" type="screen4x3"/>
   <p:notesSz cx="6858000" cy="9144000"/>
   <p:defaultTextStyle>
     <a:defPPr>
@@ -3090,114 +3090,14 @@
       <p:grpSpPr/>
       <p:sp>
         <p:nvSpPr>
-          <p:cNvPr id="2" name="Spitzenkennzahlen"/>
+          <p:cNvPr id="2" name="Navigation Startcockpit"/>
           <p:cNvSpPr/>
           <p:nvPr/>
         </p:nvSpPr>
         <p:spPr>
           <a:xfrm>
             <a:off x="198000" y="10800"/>
-            <a:ext cx="2178000" cy="216000"/>
-          </a:xfrm>
-          <a:prstGeom prst="roundRect">
-            <a:avLst>
-              <a:gd name="adj" fmla="val 13333"/>
-            </a:avLst>
-          </a:prstGeom>
-          <a:solidFill>
-            <a:srgbClr val="EFEFEF"/>
-          </a:solidFill>
-          <a:ln w="6350">
-            <a:solidFill>
-              <a:srgbClr val="9A9A9A"/>
-            </a:solidFill>
-            <a:round/>
-          </a:ln>
-        </p:spPr>
-        <p:txBody>
-          <a:bodyPr rtlCol="0" anchor="ctr" lIns="32400" rIns="32400" tIns="21600" bIns="21600" wrap="square">
-            <a:noAutofit/>
-          </a:bodyPr>
-          <a:lstStyle/>
-          <a:p>
-            <a:pPr algn="ctr">
-              <a:lnSpc>
-                <a:spcPts val="826"/>
-              </a:lnSpc>
-              <a:buNone/>
-            </a:pPr>
-            <a:r>
-              <a:rPr lang="de-DE" sz="700" b="1" i="0">
-                <a:solidFill>
-                  <a:srgbClr val="1A1A1A"/>
-                </a:solidFill>
-                <a:latin typeface="Arial"/>
-              </a:rPr>
-              <a:t>Spitzenkennzahlen</a:t>
-            </a:r>
-          </a:p>
-        </p:txBody>
-      </p:sp>
-      <p:sp>
-        <p:nvSpPr>
-          <p:cNvPr id="3" name="Reporting-Navigation"/>
-          <p:cNvSpPr/>
-          <p:nvPr/>
-        </p:nvSpPr>
-        <p:spPr>
-          <a:xfrm>
-            <a:off x="378000" y="378000"/>
-            <a:ext cx="1818000" cy="201600"/>
-          </a:xfrm>
-          <a:prstGeom prst="roundRect">
-            <a:avLst>
-              <a:gd name="adj" fmla="val 14285"/>
-            </a:avLst>
-          </a:prstGeom>
-          <a:solidFill>
-            <a:srgbClr val="EFEFEF"/>
-          </a:solidFill>
-          <a:ln w="6350">
-            <a:solidFill>
-              <a:srgbClr val="9A9A9A"/>
-            </a:solidFill>
-            <a:round/>
-          </a:ln>
-        </p:spPr>
-        <p:txBody>
-          <a:bodyPr rtlCol="0" anchor="ctr" lIns="32400" rIns="32400" tIns="21600" bIns="21600" wrap="square">
-            <a:noAutofit/>
-          </a:bodyPr>
-          <a:lstStyle/>
-          <a:p>
-            <a:pPr algn="ctr">
-              <a:lnSpc>
-                <a:spcPts val="826"/>
-              </a:lnSpc>
-              <a:buNone/>
-            </a:pPr>
-            <a:r>
-              <a:rPr lang="de-DE" sz="700" b="0" i="0">
-                <a:solidFill>
-                  <a:srgbClr val="1A1A1A"/>
-                </a:solidFill>
-                <a:latin typeface="Arial"/>
-              </a:rPr>
-              <a:t>Reporting-Navigation gemäß Organigramm</a:t>
-            </a:r>
-          </a:p>
-        </p:txBody>
-      </p:sp>
-      <p:sp>
-        <p:nvSpPr>
-          <p:cNvPr id="4" name="Detailanalyse Bereichsstruktur"/>
-          <p:cNvSpPr/>
-          <p:nvPr/>
-        </p:nvSpPr>
-        <p:spPr>
-          <a:xfrm>
-            <a:off x="198000" y="745200"/>
-            <a:ext cx="2178000" cy="288000"/>
+            <a:ext cx="3492000" cy="288000"/>
           </a:xfrm>
           <a:prstGeom prst="roundRect">
             <a:avLst>
@@ -3233,7 +3133,7 @@
                 </a:solidFill>
                 <a:latin typeface="Arial"/>
               </a:rPr>
-              <a:t>Detailanalyse: Bereichsstruktur</a:t>
+              <a:t>Navigation gemäß Startcockpit</a:t>
             </a:r>
           </a:p>
           <a:p>
@@ -3250,21 +3150,21 @@
                 </a:solidFill>
                 <a:latin typeface="Arial"/>
               </a:rPr>
-              <a:t>z. B. Produktentwicklung</a:t>
-            </a:r>
-          </a:p>
-        </p:txBody>
-      </p:sp>
-      <p:sp>
-        <p:nvSpPr>
-          <p:cNvPr id="5" name="Detailanalyse Kostenträgerstruktur"/>
+              <a:t>(z. B. nach Bereichen und Spitzenkennzahlen)</a:t>
+            </a:r>
+          </a:p>
+        </p:txBody>
+      </p:sp>
+      <p:sp>
+        <p:nvSpPr>
+          <p:cNvPr id="3" name="Detailanalyse Bereichsstruktur"/>
           <p:cNvSpPr/>
           <p:nvPr/>
         </p:nvSpPr>
         <p:spPr>
           <a:xfrm>
-            <a:off x="198000" y="1616400"/>
-            <a:ext cx="2178000" cy="288000"/>
+            <a:off x="198000" y="464400"/>
+            <a:ext cx="3492000" cy="288000"/>
           </a:xfrm>
           <a:prstGeom prst="roundRect">
             <a:avLst>
@@ -3300,7 +3200,7 @@
                 </a:solidFill>
                 <a:latin typeface="Arial"/>
               </a:rPr>
-              <a:t>Detailanalyse: Kostenträgerstruktur</a:t>
+              <a:t>Detailanalyse: Bereichsstruktur</a:t>
             </a:r>
           </a:p>
           <a:p>
@@ -3317,21 +3217,88 @@
                 </a:solidFill>
                 <a:latin typeface="Arial"/>
               </a:rPr>
-              <a:t>z. B. für Key-Account-Manager</a:t>
-            </a:r>
-          </a:p>
-        </p:txBody>
-      </p:sp>
-      <p:sp>
-        <p:nvSpPr>
-          <p:cNvPr id="6" name="Kennzahlen 1"/>
+              <a:t>z. B. Management, Vertrieb und Produktion</a:t>
+            </a:r>
+          </a:p>
+        </p:txBody>
+      </p:sp>
+      <p:sp>
+        <p:nvSpPr>
+          <p:cNvPr id="4" name="Detailanalyse Kostenträgerstruktur"/>
           <p:cNvSpPr/>
           <p:nvPr/>
         </p:nvSpPr>
         <p:spPr>
           <a:xfrm>
-            <a:off x="360000" y="1198800"/>
-            <a:ext cx="720000" cy="201600"/>
+            <a:off x="198000" y="1335600"/>
+            <a:ext cx="3492000" cy="288000"/>
+          </a:xfrm>
+          <a:prstGeom prst="roundRect">
+            <a:avLst>
+              <a:gd name="adj" fmla="val 10000"/>
+            </a:avLst>
+          </a:prstGeom>
+          <a:solidFill>
+            <a:srgbClr val="EFEFEF"/>
+          </a:solidFill>
+          <a:ln w="6350">
+            <a:solidFill>
+              <a:srgbClr val="9A9A9A"/>
+            </a:solidFill>
+            <a:round/>
+          </a:ln>
+        </p:spPr>
+        <p:txBody>
+          <a:bodyPr rtlCol="0" anchor="ctr" lIns="32400" rIns="32400" tIns="21600" bIns="21600" wrap="square">
+            <a:noAutofit/>
+          </a:bodyPr>
+          <a:lstStyle/>
+          <a:p>
+            <a:pPr algn="ctr">
+              <a:lnSpc>
+                <a:spcPts val="826"/>
+              </a:lnSpc>
+              <a:buNone/>
+            </a:pPr>
+            <a:r>
+              <a:rPr lang="de-DE" sz="700" b="1" i="0">
+                <a:solidFill>
+                  <a:srgbClr val="1A1A1A"/>
+                </a:solidFill>
+                <a:latin typeface="Arial"/>
+              </a:rPr>
+              <a:t>Detailanalyse: Kostenträgerstruktur</a:t>
+            </a:r>
+          </a:p>
+          <a:p>
+            <a:pPr algn="ctr">
+              <a:lnSpc>
+                <a:spcPts val="767"/>
+              </a:lnSpc>
+              <a:buNone/>
+            </a:pPr>
+            <a:r>
+              <a:rPr lang="de-DE" sz="650" b="0" i="0">
+                <a:solidFill>
+                  <a:srgbClr val="1A1A1A"/>
+                </a:solidFill>
+                <a:latin typeface="Arial"/>
+              </a:rPr>
+              <a:t>z. B. dezidiert für Key-Account-Manager</a:t>
+            </a:r>
+          </a:p>
+        </p:txBody>
+      </p:sp>
+      <p:sp>
+        <p:nvSpPr>
+          <p:cNvPr id="5" name="Kennzahlen 1"/>
+          <p:cNvSpPr/>
+          <p:nvPr/>
+        </p:nvSpPr>
+        <p:spPr>
+          <a:xfrm>
+            <a:off x="648000" y="918000"/>
+            <a:ext cx="1008000" cy="201600"/>
           </a:xfrm>
           <a:prstGeom prst="roundRect">
             <a:avLst>
@@ -3374,14 +3341,14 @@
       </p:sp>
       <p:sp>
         <p:nvSpPr>
-          <p:cNvPr id="7" name="Berichte 1"/>
+          <p:cNvPr id="6" name="Berichte 1"/>
           <p:cNvSpPr/>
           <p:nvPr/>
         </p:nvSpPr>
         <p:spPr>
           <a:xfrm>
-            <a:off x="1494000" y="1198800"/>
-            <a:ext cx="720000" cy="201600"/>
+            <a:off x="2232000" y="918000"/>
+            <a:ext cx="1008000" cy="201600"/>
           </a:xfrm>
           <a:prstGeom prst="roundRect">
             <a:avLst>
@@ -3424,14 +3391,14 @@
       </p:sp>
       <p:sp>
         <p:nvSpPr>
-          <p:cNvPr id="8" name="Kennzahlen–Berichte 1"/>
+          <p:cNvPr id="7" name="Kennzahlen–Berichte 1"/>
           <p:cNvSpPr/>
           <p:nvPr/>
         </p:nvSpPr>
         <p:spPr>
           <a:xfrm>
-            <a:off x="1080000" y="1299600"/>
-            <a:ext cx="414000" cy="0"/>
+            <a:off x="1656000" y="1018800"/>
+            <a:ext cx="576000" cy="0"/>
           </a:xfrm>
           <a:custGeom>
             <a:avLst/>
@@ -3440,12 +3407,12 @@
             <a:cxnLst/>
             <a:rect l="l" t="t" r="r" b="b"/>
             <a:pathLst>
-              <a:path w="414000" h="0">
+              <a:path w="576000" h="0">
                 <a:moveTo>
                   <a:pt x="0" y="0"/>
                 </a:moveTo>
                 <a:lnTo>
-                  <a:pt x="414000" y="0"/>
+                  <a:pt x="576000" y="0"/>
                 </a:lnTo>
               </a:path>
             </a:pathLst>
@@ -3470,14 +3437,14 @@
       </p:sp>
       <p:sp>
         <p:nvSpPr>
-          <p:cNvPr id="9" name="Kennzahlen 2"/>
+          <p:cNvPr id="8" name="Kennzahlen 2"/>
           <p:cNvSpPr/>
           <p:nvPr/>
         </p:nvSpPr>
         <p:spPr>
           <a:xfrm>
-            <a:off x="360000" y="2070000"/>
-            <a:ext cx="720000" cy="201600"/>
+            <a:off x="648000" y="1789200"/>
+            <a:ext cx="1008000" cy="201600"/>
           </a:xfrm>
           <a:prstGeom prst="roundRect">
             <a:avLst>
@@ -3520,14 +3487,14 @@
       </p:sp>
       <p:sp>
         <p:nvSpPr>
-          <p:cNvPr id="10" name="Berichte 2"/>
+          <p:cNvPr id="9" name="Berichte 2"/>
           <p:cNvSpPr/>
           <p:nvPr/>
         </p:nvSpPr>
         <p:spPr>
           <a:xfrm>
-            <a:off x="1494000" y="2070000"/>
-            <a:ext cx="720000" cy="201600"/>
+            <a:off x="2232000" y="1789200"/>
+            <a:ext cx="1008000" cy="201600"/>
           </a:xfrm>
           <a:prstGeom prst="roundRect">
             <a:avLst>
@@ -3570,14 +3537,14 @@
       </p:sp>
       <p:sp>
         <p:nvSpPr>
-          <p:cNvPr id="11" name="Kennzahlen–Berichte 2"/>
+          <p:cNvPr id="10" name="Kennzahlen–Berichte 2"/>
           <p:cNvSpPr/>
           <p:nvPr/>
         </p:nvSpPr>
         <p:spPr>
           <a:xfrm>
-            <a:off x="1080000" y="2170800"/>
-            <a:ext cx="414000" cy="0"/>
+            <a:off x="1656000" y="1890000"/>
+            <a:ext cx="576000" cy="0"/>
           </a:xfrm>
           <a:custGeom>
             <a:avLst/>
@@ -3586,12 +3553,12 @@
             <a:cxnLst/>
             <a:rect l="l" t="t" r="r" b="b"/>
             <a:pathLst>
-              <a:path w="414000" h="0">
+              <a:path w="576000" h="0">
                 <a:moveTo>
                   <a:pt x="0" y="0"/>
                 </a:moveTo>
                 <a:lnTo>
-                  <a:pt x="414000" y="0"/>
+                  <a:pt x="576000" y="0"/>
                 </a:lnTo>
               </a:path>
             </a:pathLst>
@@ -3616,14 +3583,14 @@
       </p:sp>
       <p:sp>
         <p:nvSpPr>
-          <p:cNvPr id="12" name="Spitzenkennzahlen–Navigation"/>
+          <p:cNvPr id="11" name="Sammelleitung"/>
           <p:cNvSpPr/>
           <p:nvPr/>
         </p:nvSpPr>
         <p:spPr>
           <a:xfrm>
-            <a:off x="1287000" y="226800"/>
-            <a:ext cx="0" cy="151200"/>
+            <a:off x="86400" y="154800"/>
+            <a:ext cx="111600" cy="1324800"/>
           </a:xfrm>
           <a:custGeom>
             <a:avLst/>
@@ -3632,60 +3599,15 @@
             <a:cxnLst/>
             <a:rect l="l" t="t" r="r" b="b"/>
             <a:pathLst>
-              <a:path w="0" h="151200">
+              <a:path w="111600" h="1324800">
                 <a:moveTo>
-                  <a:pt x="0" y="0"/>
-                </a:moveTo>
-                <a:lnTo>
-                  <a:pt x="0" y="151200"/>
-                </a:lnTo>
-              </a:path>
-            </a:pathLst>
-          </a:custGeom>
-          <a:noFill/>
-          <a:ln w="9525">
-            <a:solidFill>
-              <a:srgbClr val="3A3F44"/>
-            </a:solidFill>
-            <a:round/>
-            <a:tailEnd type="triangle" w="med" len="med"/>
-          </a:ln>
-        </p:spPr>
-        <p:txBody>
-          <a:bodyPr rtlCol="0" anchor="ctr"/>
-          <a:lstStyle/>
-          <a:p>
-            <a:pPr algn="ctr"/>
-          </a:p>
-        </p:txBody>
-      </p:sp>
-      <p:sp>
-        <p:nvSpPr>
-          <p:cNvPr id="13" name="Sammelleitung"/>
-          <p:cNvSpPr/>
-          <p:nvPr/>
-        </p:nvSpPr>
-        <p:spPr>
-          <a:xfrm>
-            <a:off x="86400" y="478800"/>
-            <a:ext cx="291600" cy="1281600"/>
-          </a:xfrm>
-          <a:custGeom>
-            <a:avLst/>
-            <a:gdLst/>
-            <a:ahLst/>
-            <a:cxnLst/>
-            <a:rect l="l" t="t" r="r" b="b"/>
-            <a:pathLst>
-              <a:path w="291600" h="1281600">
-                <a:moveTo>
-                  <a:pt x="291600" y="0"/>
+                  <a:pt x="111600" y="0"/>
                 </a:moveTo>
                 <a:lnTo>
                   <a:pt x="0" y="0"/>
                 </a:lnTo>
                 <a:lnTo>
-                  <a:pt x="0" y="1281600"/>
+                  <a:pt x="0" y="1324800"/>
                 </a:lnTo>
               </a:path>
             </a:pathLst>
@@ -3708,13 +3630,13 @@
       </p:sp>
       <p:sp>
         <p:nvSpPr>
-          <p:cNvPr id="14" name="Navigation–Bereichsstruktur"/>
+          <p:cNvPr id="12" name="Navigation–Bereichsstruktur"/>
           <p:cNvSpPr/>
           <p:nvPr/>
         </p:nvSpPr>
         <p:spPr>
           <a:xfrm>
-            <a:off x="86400" y="889200"/>
+            <a:off x="86400" y="608400"/>
             <a:ext cx="111600" cy="0"/>
           </a:xfrm>
           <a:custGeom>
@@ -3753,13 +3675,13 @@
       </p:sp>
       <p:sp>
         <p:nvSpPr>
-          <p:cNvPr id="15" name="Navigation–Kostenträgerstruktur"/>
+          <p:cNvPr id="13" name="Navigation–Kostenträgerstruktur"/>
           <p:cNvSpPr/>
           <p:nvPr/>
         </p:nvSpPr>
         <p:spPr>
           <a:xfrm>
-            <a:off x="86400" y="1760400"/>
+            <a:off x="86400" y="1479600"/>
             <a:ext cx="111600" cy="0"/>
           </a:xfrm>
           <a:custGeom>
@@ -3798,13 +3720,13 @@
       </p:sp>
       <p:sp>
         <p:nvSpPr>
-          <p:cNvPr id="16" name="Knoten"/>
+          <p:cNvPr id="14" name="Knoten"/>
           <p:cNvSpPr/>
           <p:nvPr/>
         </p:nvSpPr>
         <p:spPr>
           <a:xfrm>
-            <a:off x="70200" y="873000"/>
+            <a:off x="70200" y="592200"/>
             <a:ext cx="32400" cy="32400"/>
           </a:xfrm>
           <a:prstGeom prst="ellipse">
@@ -3827,13 +3749,13 @@
       </p:sp>
       <p:sp>
         <p:nvSpPr>
-          <p:cNvPr id="17" name="Abzweig 1"/>
+          <p:cNvPr id="15" name="Abzweig 1"/>
           <p:cNvSpPr/>
           <p:nvPr/>
         </p:nvSpPr>
         <p:spPr>
           <a:xfrm>
-            <a:off x="1287000" y="1033200"/>
+            <a:off x="1944000" y="752400"/>
             <a:ext cx="0" cy="82800"/>
           </a:xfrm>
           <a:custGeom>
@@ -3871,14 +3793,14 @@
       </p:sp>
       <p:sp>
         <p:nvSpPr>
-          <p:cNvPr id="18" name="Detail–Kennzahlen 1"/>
+          <p:cNvPr id="16" name="Detail–Kennzahlen 1"/>
           <p:cNvSpPr/>
           <p:nvPr/>
         </p:nvSpPr>
         <p:spPr>
           <a:xfrm>
-            <a:off x="720000" y="1116000"/>
-            <a:ext cx="567000" cy="82800"/>
+            <a:off x="1152000" y="835200"/>
+            <a:ext cx="792000" cy="82800"/>
           </a:xfrm>
           <a:custGeom>
             <a:avLst/>
@@ -3887,9 +3809,9 @@
             <a:cxnLst/>
             <a:rect l="l" t="t" r="r" b="b"/>
             <a:pathLst>
-              <a:path w="567000" h="82800">
+              <a:path w="792000" h="82800">
                 <a:moveTo>
-                  <a:pt x="567000" y="0"/>
+                  <a:pt x="792000" y="0"/>
                 </a:moveTo>
                 <a:lnTo>
                   <a:pt x="0" y="0"/>
@@ -3919,14 +3841,14 @@
       </p:sp>
       <p:sp>
         <p:nvSpPr>
-          <p:cNvPr id="19" name="Detail–Berichte 1"/>
+          <p:cNvPr id="17" name="Detail–Berichte 1"/>
           <p:cNvSpPr/>
           <p:nvPr/>
         </p:nvSpPr>
         <p:spPr>
           <a:xfrm>
-            <a:off x="1287000" y="1116000"/>
-            <a:ext cx="567000" cy="82800"/>
+            <a:off x="1944000" y="835200"/>
+            <a:ext cx="792000" cy="82800"/>
           </a:xfrm>
           <a:custGeom>
             <a:avLst/>
@@ -3935,15 +3857,15 @@
             <a:cxnLst/>
             <a:rect l="l" t="t" r="r" b="b"/>
             <a:pathLst>
-              <a:path w="567000" h="82800">
+              <a:path w="792000" h="82800">
                 <a:moveTo>
                   <a:pt x="0" y="0"/>
                 </a:moveTo>
                 <a:lnTo>
-                  <a:pt x="567000" y="0"/>
+                  <a:pt x="792000" y="0"/>
                 </a:lnTo>
                 <a:lnTo>
-                  <a:pt x="567000" y="82800"/>
+                  <a:pt x="792000" y="82800"/>
                 </a:lnTo>
               </a:path>
             </a:pathLst>
@@ -3967,13 +3889,13 @@
       </p:sp>
       <p:sp>
         <p:nvSpPr>
-          <p:cNvPr id="20" name="Knoten"/>
+          <p:cNvPr id="18" name="Knoten"/>
           <p:cNvSpPr/>
           <p:nvPr/>
         </p:nvSpPr>
         <p:spPr>
           <a:xfrm>
-            <a:off x="1270800" y="1099800"/>
+            <a:off x="1927800" y="819000"/>
             <a:ext cx="32400" cy="32400"/>
           </a:xfrm>
           <a:prstGeom prst="ellipse">
@@ -3996,13 +3918,13 @@
       </p:sp>
       <p:sp>
         <p:nvSpPr>
-          <p:cNvPr id="21" name="Abzweig 2"/>
+          <p:cNvPr id="19" name="Abzweig 2"/>
           <p:cNvSpPr/>
           <p:nvPr/>
         </p:nvSpPr>
         <p:spPr>
           <a:xfrm>
-            <a:off x="1287000" y="1904400"/>
+            <a:off x="1944000" y="1623600"/>
             <a:ext cx="0" cy="82800"/>
           </a:xfrm>
           <a:custGeom>
@@ -4040,14 +3962,14 @@
       </p:sp>
       <p:sp>
         <p:nvSpPr>
-          <p:cNvPr id="22" name="Detail–Kennzahlen 2"/>
+          <p:cNvPr id="20" name="Detail–Kennzahlen 2"/>
           <p:cNvSpPr/>
           <p:nvPr/>
         </p:nvSpPr>
         <p:spPr>
           <a:xfrm>
-            <a:off x="720000" y="1987200"/>
-            <a:ext cx="567000" cy="82800"/>
+            <a:off x="1152000" y="1706400"/>
+            <a:ext cx="792000" cy="82800"/>
           </a:xfrm>
           <a:custGeom>
             <a:avLst/>
@@ -4056,9 +3978,9 @@
             <a:cxnLst/>
             <a:rect l="l" t="t" r="r" b="b"/>
             <a:pathLst>
-              <a:path w="567000" h="82800">
+              <a:path w="792000" h="82800">
                 <a:moveTo>
-                  <a:pt x="567000" y="0"/>
+                  <a:pt x="792000" y="0"/>
                 </a:moveTo>
                 <a:lnTo>
                   <a:pt x="0" y="0"/>
@@ -4088,14 +4010,14 @@
       </p:sp>
       <p:sp>
         <p:nvSpPr>
-          <p:cNvPr id="23" name="Detail–Berichte 2"/>
+          <p:cNvPr id="21" name="Detail–Berichte 2"/>
           <p:cNvSpPr/>
           <p:nvPr/>
         </p:nvSpPr>
         <p:spPr>
           <a:xfrm>
-            <a:off x="1287000" y="1987200"/>
-            <a:ext cx="567000" cy="82800"/>
+            <a:off x="1944000" y="1706400"/>
+            <a:ext cx="792000" cy="82800"/>
           </a:xfrm>
           <a:custGeom>
             <a:avLst/>
@@ -4104,15 +4026,15 @@
             <a:cxnLst/>
             <a:rect l="l" t="t" r="r" b="b"/>
             <a:pathLst>
-              <a:path w="567000" h="82800">
+              <a:path w="792000" h="82800">
                 <a:moveTo>
                   <a:pt x="0" y="0"/>
                 </a:moveTo>
                 <a:lnTo>
-                  <a:pt x="567000" y="0"/>
+                  <a:pt x="792000" y="0"/>
                 </a:lnTo>
                 <a:lnTo>
-                  <a:pt x="567000" y="82800"/>
+                  <a:pt x="792000" y="82800"/>
                 </a:lnTo>
               </a:path>
             </a:pathLst>
@@ -4136,13 +4058,13 @@
       </p:sp>
       <p:sp>
         <p:nvSpPr>
-          <p:cNvPr id="24" name="Knoten"/>
+          <p:cNvPr id="22" name="Knoten"/>
           <p:cNvSpPr/>
           <p:nvPr/>
         </p:nvSpPr>
         <p:spPr>
           <a:xfrm>
-            <a:off x="1270800" y="1971000"/>
+            <a:off x="1927800" y="1690200"/>
             <a:ext cx="32400" cy="32400"/>
           </a:xfrm>
           <a:prstGeom prst="ellipse">
@@ -4165,13 +4087,13 @@
       </p:sp>
       <p:sp>
         <p:nvSpPr>
-          <p:cNvPr id="25" name="Wechsel Detailanalysen"/>
+          <p:cNvPr id="23" name="Wechsel Detailanalysen"/>
           <p:cNvSpPr/>
           <p:nvPr/>
         </p:nvSpPr>
         <p:spPr>
           <a:xfrm>
-            <a:off x="2376000" y="889200"/>
+            <a:off x="3690000" y="608400"/>
             <a:ext cx="144000" cy="871200"/>
           </a:xfrm>
           <a:custGeom>
@@ -4212,159 +4134,6 @@
           <a:lstStyle/>
           <a:p>
             <a:pPr algn="ctr"/>
-          </a:p>
-        </p:txBody>
-      </p:sp>
-      <p:sp>
-        <p:nvSpPr>
-          <p:cNvPr id="26" name="Beispiel Management-Cockpit"/>
-          <p:cNvSpPr/>
-          <p:nvPr/>
-        </p:nvSpPr>
-        <p:spPr>
-          <a:xfrm>
-            <a:off x="2682000" y="10800"/>
-            <a:ext cx="1267200" cy="216000"/>
-          </a:xfrm>
-          <a:prstGeom prst="roundRect">
-            <a:avLst>
-              <a:gd name="adj" fmla="val 13333"/>
-            </a:avLst>
-          </a:prstGeom>
-          <a:solidFill>
-            <a:srgbClr val="FFFFFF"/>
-          </a:solidFill>
-          <a:ln w="6350">
-            <a:solidFill>
-              <a:srgbClr val="9A9A9A"/>
-            </a:solidFill>
-            <a:prstDash val="sysDash"/>
-            <a:round/>
-          </a:ln>
-        </p:spPr>
-        <p:txBody>
-          <a:bodyPr rtlCol="0" anchor="ctr" lIns="32400" rIns="32400" tIns="21600" bIns="21600" wrap="square">
-            <a:noAutofit/>
-          </a:bodyPr>
-          <a:lstStyle/>
-          <a:p>
-            <a:pPr algn="ctr">
-              <a:lnSpc>
-                <a:spcPts val="767"/>
-              </a:lnSpc>
-              <a:buNone/>
-            </a:pPr>
-            <a:r>
-              <a:rPr lang="de-DE" sz="650" b="0" i="0">
-                <a:solidFill>
-                  <a:srgbClr val="4D4D4D"/>
-                </a:solidFill>
-                <a:latin typeface="Arial"/>
-              </a:rPr>
-              <a:t>z. B. Management-Cockpit</a:t>
-            </a:r>
-          </a:p>
-        </p:txBody>
-      </p:sp>
-      <p:sp>
-        <p:nvSpPr>
-          <p:cNvPr id="27" name="Beispiel Umsatzanalyse je Bereich"/>
-          <p:cNvSpPr/>
-          <p:nvPr/>
-        </p:nvSpPr>
-        <p:spPr>
-          <a:xfrm>
-            <a:off x="2682000" y="745200"/>
-            <a:ext cx="1267200" cy="288000"/>
-          </a:xfrm>
-          <a:prstGeom prst="roundRect">
-            <a:avLst>
-              <a:gd name="adj" fmla="val 10000"/>
-            </a:avLst>
-          </a:prstGeom>
-          <a:solidFill>
-            <a:srgbClr val="FFFFFF"/>
-          </a:solidFill>
-          <a:ln w="6350">
-            <a:solidFill>
-              <a:srgbClr val="9A9A9A"/>
-            </a:solidFill>
-            <a:prstDash val="sysDash"/>
-            <a:round/>
-          </a:ln>
-        </p:spPr>
-        <p:txBody>
-          <a:bodyPr rtlCol="0" anchor="ctr" lIns="32400" rIns="32400" tIns="21600" bIns="21600" wrap="square">
-            <a:noAutofit/>
-          </a:bodyPr>
-          <a:lstStyle/>
-          <a:p>
-            <a:pPr algn="ctr">
-              <a:lnSpc>
-                <a:spcPts val="767"/>
-              </a:lnSpc>
-              <a:buNone/>
-            </a:pPr>
-            <a:r>
-              <a:rPr lang="de-DE" sz="650" b="0" i="0">
-                <a:solidFill>
-                  <a:srgbClr val="4D4D4D"/>
-                </a:solidFill>
-                <a:latin typeface="Arial"/>
-              </a:rPr>
-              <a:t>z. B. Umsatzanalyse je Bereich</a:t>
-            </a:r>
-          </a:p>
-        </p:txBody>
-      </p:sp>
-      <p:sp>
-        <p:nvSpPr>
-          <p:cNvPr id="28" name="Beispiel Deckungsbeitragsanalyse"/>
-          <p:cNvSpPr/>
-          <p:nvPr/>
-        </p:nvSpPr>
-        <p:spPr>
-          <a:xfrm>
-            <a:off x="2682000" y="1616400"/>
-            <a:ext cx="1267200" cy="288000"/>
-          </a:xfrm>
-          <a:prstGeom prst="roundRect">
-            <a:avLst>
-              <a:gd name="adj" fmla="val 10000"/>
-            </a:avLst>
-          </a:prstGeom>
-          <a:solidFill>
-            <a:srgbClr val="FFFFFF"/>
-          </a:solidFill>
-          <a:ln w="6350">
-            <a:solidFill>
-              <a:srgbClr val="9A9A9A"/>
-            </a:solidFill>
-            <a:prstDash val="sysDash"/>
-            <a:round/>
-          </a:ln>
-        </p:spPr>
-        <p:txBody>
-          <a:bodyPr rtlCol="0" anchor="ctr" lIns="32400" rIns="32400" tIns="21600" bIns="21600" wrap="square">
-            <a:noAutofit/>
-          </a:bodyPr>
-          <a:lstStyle/>
-          <a:p>
-            <a:pPr algn="ctr">
-              <a:lnSpc>
-                <a:spcPts val="767"/>
-              </a:lnSpc>
-              <a:buNone/>
-            </a:pPr>
-            <a:r>
-              <a:rPr lang="de-DE" sz="650" b="0" i="0">
-                <a:solidFill>
-                  <a:srgbClr val="4D4D4D"/>
-                </a:solidFill>
-                <a:latin typeface="Arial"/>
-              </a:rPr>
-              <a:t>z. B. Deckungsbeitragsanalyse</a:t>
-            </a:r>
           </a:p>
         </p:txBody>
       </p:sp>

--- a/abbildungen/kap3/Analysewege_im_Reporting.pptx
+++ b/abbildungen/kap3/Analysewege_im_Reporting.pptx
@@ -3133,7 +3133,7 @@
                 </a:solidFill>
                 <a:latin typeface="Arial"/>
               </a:rPr>
-              <a:t>Navigation gemäß Startcockpit</a:t>
+              <a:t>Navigation im Startcockpit</a:t>
             </a:r>
           </a:p>
           <a:p>
@@ -3150,7 +3150,7 @@
                 </a:solidFill>
                 <a:latin typeface="Arial"/>
               </a:rPr>
-              <a:t>(z. B. nach Bereichen und Spitzenkennzahlen)</a:t>
+              <a:t>z. B. nach Bereichen und Spitzenkennzahlen</a:t>
             </a:r>
           </a:p>
         </p:txBody>
